--- a/projects/drug-information-practical/slides/ch02-drug-information-sources.pptx
+++ b/projects/drug-information-practical/slides/ch02-drug-information-sources.pptx
@@ -5718,7 +5718,7 @@
     <p:bg>
       <p:bgPr>
         <a:solidFill>
-          <a:srgbClr val="FFFFFF"/>
+          <a:srgbClr val="F5EDE3"/>
         </a:solidFill>
         <a:effectLst/>
       </p:bgPr>
@@ -6093,7 +6093,7 @@
     <p:bg>
       <p:bgPr>
         <a:solidFill>
-          <a:srgbClr val="FFFFFF"/>
+          <a:srgbClr val="F5EDE3"/>
         </a:solidFill>
         <a:effectLst/>
       </p:bgPr>
@@ -6618,7 +6618,7 @@
     <p:bg>
       <p:bgPr>
         <a:solidFill>
-          <a:srgbClr val="FFFFFF"/>
+          <a:srgbClr val="F5EDE3"/>
         </a:solidFill>
         <a:effectLst/>
       </p:bgPr>
@@ -7418,7 +7418,7 @@
     <p:bg>
       <p:bgPr>
         <a:solidFill>
-          <a:srgbClr val="FFFFFF"/>
+          <a:srgbClr val="F5EDE3"/>
         </a:solidFill>
         <a:effectLst/>
       </p:bgPr>
@@ -7923,7 +7923,7 @@
     <p:bg>
       <p:bgPr>
         <a:solidFill>
-          <a:srgbClr val="FFFFFF"/>
+          <a:srgbClr val="F5EDE3"/>
         </a:solidFill>
         <a:effectLst/>
       </p:bgPr>
@@ -8298,7 +8298,7 @@
     <p:bg>
       <p:bgPr>
         <a:solidFill>
-          <a:srgbClr val="FFFFFF"/>
+          <a:srgbClr val="F5EDE3"/>
         </a:solidFill>
         <a:effectLst/>
       </p:bgPr>
@@ -8628,7 +8628,7 @@
     <p:bg>
       <p:bgPr>
         <a:solidFill>
-          <a:srgbClr val="FFFFFF"/>
+          <a:srgbClr val="F5EDE3"/>
         </a:solidFill>
         <a:effectLst/>
       </p:bgPr>
@@ -9434,7 +9434,7 @@
     <p:bg>
       <p:bgPr>
         <a:solidFill>
-          <a:srgbClr val="FFFFFF"/>
+          <a:srgbClr val="F5EDE3"/>
         </a:solidFill>
         <a:effectLst/>
       </p:bgPr>
@@ -10283,7 +10283,7 @@
     <p:bg>
       <p:bgPr>
         <a:solidFill>
-          <a:srgbClr val="FFFFFF"/>
+          <a:srgbClr val="F5EDE3"/>
         </a:solidFill>
         <a:effectLst/>
       </p:bgPr>
@@ -11089,7 +11089,7 @@
     <p:bg>
       <p:bgPr>
         <a:solidFill>
-          <a:srgbClr val="FFFFFF"/>
+          <a:srgbClr val="F5EDE3"/>
         </a:solidFill>
         <a:effectLst/>
       </p:bgPr>
@@ -11938,7 +11938,7 @@
     <p:bg>
       <p:bgPr>
         <a:solidFill>
-          <a:srgbClr val="FFFFFF"/>
+          <a:srgbClr val="F5EDE3"/>
         </a:solidFill>
         <a:effectLst/>
       </p:bgPr>
@@ -12676,7 +12676,7 @@
     <p:bg>
       <p:bgPr>
         <a:solidFill>
-          <a:srgbClr val="FFFFFF"/>
+          <a:srgbClr val="F5EDE3"/>
         </a:solidFill>
         <a:effectLst/>
       </p:bgPr>
@@ -13482,7 +13482,7 @@
     <p:bg>
       <p:bgPr>
         <a:solidFill>
-          <a:srgbClr val="FFFFFF"/>
+          <a:srgbClr val="F5EDE3"/>
         </a:solidFill>
         <a:effectLst/>
       </p:bgPr>
@@ -14331,7 +14331,7 @@
     <p:bg>
       <p:bgPr>
         <a:solidFill>
-          <a:srgbClr val="FFFFFF"/>
+          <a:srgbClr val="F5EDE3"/>
         </a:solidFill>
         <a:effectLst/>
       </p:bgPr>
@@ -15137,7 +15137,7 @@
     <p:bg>
       <p:bgPr>
         <a:solidFill>
-          <a:srgbClr val="FFFFFF"/>
+          <a:srgbClr val="F5EDE3"/>
         </a:solidFill>
         <a:effectLst/>
       </p:bgPr>
@@ -15986,7 +15986,7 @@
     <p:bg>
       <p:bgPr>
         <a:solidFill>
-          <a:srgbClr val="FFFFFF"/>
+          <a:srgbClr val="F5EDE3"/>
         </a:solidFill>
         <a:effectLst/>
       </p:bgPr>
@@ -16792,7 +16792,7 @@
     <p:bg>
       <p:bgPr>
         <a:solidFill>
-          <a:srgbClr val="FFFFFF"/>
+          <a:srgbClr val="F5EDE3"/>
         </a:solidFill>
         <a:effectLst/>
       </p:bgPr>
@@ -17641,7 +17641,7 @@
     <p:bg>
       <p:bgPr>
         <a:solidFill>
-          <a:srgbClr val="FFFFFF"/>
+          <a:srgbClr val="F5EDE3"/>
         </a:solidFill>
         <a:effectLst/>
       </p:bgPr>
@@ -18494,7 +18494,7 @@
     <p:bg>
       <p:bgPr>
         <a:solidFill>
-          <a:srgbClr val="FFFFFF"/>
+          <a:srgbClr val="F5EDE3"/>
         </a:solidFill>
         <a:effectLst/>
       </p:bgPr>
@@ -19082,7 +19082,7 @@
     <p:bg>
       <p:bgPr>
         <a:solidFill>
-          <a:srgbClr val="FFFFFF"/>
+          <a:srgbClr val="F5EDE3"/>
         </a:solidFill>
         <a:effectLst/>
       </p:bgPr>
@@ -19429,7 +19429,7 @@
     <p:bg>
       <p:bgPr>
         <a:solidFill>
-          <a:srgbClr val="FFFFFF"/>
+          <a:srgbClr val="F5EDE3"/>
         </a:solidFill>
         <a:effectLst/>
       </p:bgPr>
@@ -20057,7 +20057,7 @@
     <p:bg>
       <p:bgPr>
         <a:solidFill>
-          <a:srgbClr val="FFFFFF"/>
+          <a:srgbClr val="F5EDE3"/>
         </a:solidFill>
         <a:effectLst/>
       </p:bgPr>
@@ -20592,7 +20592,7 @@
     <p:bg>
       <p:bgPr>
         <a:solidFill>
-          <a:srgbClr val="FFFFFF"/>
+          <a:srgbClr val="F5EDE3"/>
         </a:solidFill>
         <a:effectLst/>
       </p:bgPr>
@@ -21354,7 +21354,7 @@
     <p:bg>
       <p:bgPr>
         <a:solidFill>
-          <a:srgbClr val="FFFFFF"/>
+          <a:srgbClr val="F5EDE3"/>
         </a:solidFill>
         <a:effectLst/>
       </p:bgPr>
@@ -21988,7 +21988,7 @@
     <p:bg>
       <p:bgPr>
         <a:solidFill>
-          <a:srgbClr val="FFFFFF"/>
+          <a:srgbClr val="F5EDE3"/>
         </a:solidFill>
         <a:effectLst/>
       </p:bgPr>
